--- a/Power BI/QuoteForge_Executive_Presentation.pptx
+++ b/Power BI/QuoteForge_Executive_Presentation.pptx
@@ -3270,7 +3270,7 @@
                     <a:lstStyle/>
                     <a:p>
                       <a:r>
-                        <a:t>$220.00</a:t>
+                        <a:t>$0.00</a:t>
                       </a:r>
                     </a:p>
                   </a:txBody>
@@ -3322,7 +3322,7 @@
                     <a:lstStyle/>
                     <a:p>
                       <a:r>
-                        <a:t>$22.10</a:t>
+                        <a:t>$0.00</a:t>
                       </a:r>
                     </a:p>
                   </a:txBody>
@@ -3348,7 +3348,7 @@
                     <a:lstStyle/>
                     <a:p>
                       <a:r>
-                        <a:t>$196.10</a:t>
+                        <a:t>$-0.30</a:t>
                       </a:r>
                     </a:p>
                   </a:txBody>
@@ -3374,7 +3374,7 @@
                     <a:lstStyle/>
                     <a:p>
                       <a:r>
-                        <a:t>89.1%</a:t>
+                        <a:t>0.0%</a:t>
                       </a:r>
                     </a:p>
                   </a:txBody>
@@ -3400,7 +3400,7 @@
                     <a:lstStyle/>
                     <a:p>
                       <a:r>
-                        <a:t>6</a:t>
+                        <a:t>0</a:t>
                       </a:r>
                     </a:p>
                   </a:txBody>

--- a/Power BI/QuoteForge_Executive_Presentation.pptx
+++ b/Power BI/QuoteForge_Executive_Presentation.pptx
@@ -3619,7 +3619,7 @@
                     <a:lstStyle/>
                     <a:p>
                       <a:r>
-                        <a:t>of 9 orders</a:t>
+                        <a:t>of 0 orders</a:t>
                       </a:r>
                     </a:p>
                   </a:txBody>
@@ -3776,7 +3776,7 @@
                     <a:lstStyle/>
                     <a:p>
                       <a:r>
-                        <a:t>Unknown</a:t>
+                        <a:t>(no data yet)</a:t>
                       </a:r>
                     </a:p>
                   </a:txBody>
@@ -3788,7 +3788,7 @@
                     <a:lstStyle/>
                     <a:p>
                       <a:r>
-                        <a:t>9</a:t>
+                        <a:t>0</a:t>
                       </a:r>
                     </a:p>
                   </a:txBody>
@@ -3800,7 +3800,7 @@
                     <a:lstStyle/>
                     <a:p>
                       <a:r>
-                        <a:t>$220.00</a:t>
+                        <a:t>$0.00</a:t>
                       </a:r>
                     </a:p>
                   </a:txBody>
